--- a/system-design-101/vi/lessons/sd-01-047/slides/sd-01-047.pptx
+++ b/system-design-101/vi/lessons/sd-01-047/slides/sd-01-047.pptx
@@ -9301,7 +9301,7 @@
         <p:spPr>
           <a:xfrm>
             <a:off x="914400" y="2286000"/>
-            <a:ext cx="16459200" cy="1143000"/>
+            <a:ext cx="16459200" cy="1190625"/>
           </a:xfrm>
           <a:prstGeom prst="rect">
             <a:avLst/>
@@ -9310,17 +9310,17 @@
           <a:ln/>
         </p:spPr>
         <p:txBody>
-          <a:bodyPr wrap="square" lIns="0" tIns="50292" rIns="0" bIns="-50292" rtlCol="0" anchor="t"/>
+          <a:bodyPr wrap="square" lIns="0" tIns="52578" rIns="0" bIns="-52578" rtlCol="0" anchor="t"/>
           <a:lstStyle/>
           <a:p>
             <a:pPr algn="l" indent="0" marL="0">
               <a:lnSpc>
-                <a:spcPts val="7128"/>
+                <a:spcPts val="7452"/>
               </a:lnSpc>
               <a:buNone/>
             </a:pPr>
             <a:r>
-              <a:rPr lang="en-US" sz="6600" dirty="0" spc="-1" kern="0">
+              <a:rPr lang="en-US" sz="6900" dirty="0" spc="0" kern="0">
                 <a:solidFill>
                   <a:srgbClr val="14161C"/>
                 </a:solidFill>
@@ -9331,7 +9331,7 @@
               <a:t>Không.</a:t>
             </a:r>
             <a:r>
-              <a:rPr lang="en-US" sz="6600" dirty="0" spc="-120" kern="0">
+              <a:rPr lang="en-US" sz="6900" dirty="0" spc="-130" kern="0">
                 <a:solidFill>
                   <a:srgbClr val="14161C"/>
                 </a:solidFill>
@@ -9342,7 +9342,7 @@
               <a:t> Tóm</a:t>
             </a:r>
             <a:r>
-              <a:rPr lang="en-US" sz="6600" dirty="0" spc="-4" kern="0">
+              <a:rPr lang="en-US" sz="6900" dirty="0" spc="-5" kern="0">
                 <a:solidFill>
                   <a:srgbClr val="14161C"/>
                 </a:solidFill>
@@ -9353,7 +9353,7 @@
               <a:t> tắt</a:t>
             </a:r>
             <a:r>
-              <a:rPr lang="en-US" sz="6600" dirty="0" spc="13" kern="0">
+              <a:rPr lang="en-US" sz="6900" dirty="0" spc="11" kern="0">
                 <a:solidFill>
                   <a:srgbClr val="14161C"/>
                 </a:solidFill>
@@ -9364,7 +9364,7 @@
               <a:t> đã</a:t>
             </a:r>
             <a:r>
-              <a:rPr lang="en-US" sz="6600" dirty="0" spc="-4" kern="0">
+              <a:rPr lang="en-US" sz="6900" dirty="0" spc="-2" kern="0">
                 <a:solidFill>
                   <a:srgbClr val="14161C"/>
                 </a:solidFill>
@@ -9374,7 +9374,7 @@
               </a:rPr>
               <a:t> lỗi.</a:t>
             </a:r>
-            <a:endParaRPr lang="en-US" sz="6600" dirty="0"/>
+            <a:endParaRPr lang="en-US" sz="6900" dirty="0"/>
           </a:p>
         </p:txBody>
       </p:sp>

--- a/system-design-101/vi/lessons/sd-01-047/slides/sd-01-047.pptx
+++ b/system-design-101/vi/lessons/sd-01-047/slides/sd-01-047.pptx
@@ -31,12 +31,8 @@
       <p:regular r:id="rId17"/>
     </p:embeddedFont>
     <p:embeddedFont>
-      <p:font typeface="Roboto Mono"/>
-      <p:bold r:id="rId19"/>
-    </p:embeddedFont>
-    <p:embeddedFont>
       <p:font typeface="Be Vietnam Pro SemiBold"/>
-      <p:regular r:id="rId20"/>
+      <p:regular r:id="rId19"/>
     </p:embeddedFont>
   </p:embeddedFontLst>
   <p:defaultTextStyle>
@@ -2182,7 +2178,7 @@
           <a:ln/>
         </p:spPr>
         <p:txBody>
-          <a:bodyPr wrap="square" lIns="0" tIns="12445" rIns="0" bIns="-12445" rtlCol="0" anchor="t"/>
+          <a:bodyPr wrap="square" lIns="0" tIns="5667" rIns="0" bIns="-5667" rtlCol="0" anchor="t"/>
           <a:lstStyle/>
           <a:p>
             <a:pPr algn="l" indent="0" marL="0">
@@ -2192,13 +2188,13 @@
               <a:buNone/>
             </a:pPr>
             <a:r>
-              <a:rPr lang="en-US" sz="2550" b="1" dirty="0" spc="5" kern="0">
+              <a:rPr lang="en-US" sz="2550" b="1" dirty="0" spc="-9" kern="0">
                 <a:solidFill>
                   <a:srgbClr val="F3EEE3"/>
                 </a:solidFill>
-                <a:latin typeface="Roboto Mono" pitchFamily="34" charset="0"/>
-                <a:ea typeface="Roboto Mono" pitchFamily="34" charset="-122"/>
-                <a:cs typeface="Roboto Mono" pitchFamily="34" charset="-120"/>
+                <a:latin typeface="Be Vietnam Pro" pitchFamily="34" charset="0"/>
+                <a:ea typeface="Be Vietnam Pro" pitchFamily="34" charset="-122"/>
+                <a:cs typeface="Be Vietnam Pro" pitchFamily="34" charset="-120"/>
               </a:rPr>
               <a:t>schema</a:t>
             </a:r>
@@ -2348,7 +2344,7 @@
           <a:ln/>
         </p:spPr>
         <p:txBody>
-          <a:bodyPr wrap="square" lIns="0" tIns="12445" rIns="0" bIns="-12445" rtlCol="0" anchor="t"/>
+          <a:bodyPr wrap="square" lIns="0" tIns="5667" rIns="0" bIns="-5667" rtlCol="0" anchor="t"/>
           <a:lstStyle/>
           <a:p>
             <a:pPr algn="l" indent="0" marL="0">
@@ -2358,13 +2354,13 @@
               <a:buNone/>
             </a:pPr>
             <a:r>
-              <a:rPr lang="en-US" sz="2550" b="1" dirty="0" spc="5" kern="0">
+              <a:rPr lang="en-US" sz="2550" b="1" dirty="0" spc="-20" kern="0">
                 <a:solidFill>
                   <a:srgbClr val="F3EEE3"/>
                 </a:solidFill>
-                <a:latin typeface="Roboto Mono" pitchFamily="34" charset="0"/>
-                <a:ea typeface="Roboto Mono" pitchFamily="34" charset="-122"/>
-                <a:cs typeface="Roboto Mono" pitchFamily="34" charset="-120"/>
+                <a:latin typeface="Be Vietnam Pro" pitchFamily="34" charset="0"/>
+                <a:ea typeface="Be Vietnam Pro" pitchFamily="34" charset="-122"/>
+                <a:cs typeface="Be Vietnam Pro" pitchFamily="34" charset="-120"/>
               </a:rPr>
               <a:t>resolver</a:t>
             </a:r>
@@ -2503,7 +2499,7 @@
           <a:ln/>
         </p:spPr>
         <p:txBody>
-          <a:bodyPr wrap="square" lIns="0" tIns="12445" rIns="0" bIns="-12445" rtlCol="0" anchor="t"/>
+          <a:bodyPr wrap="square" lIns="0" tIns="5667" rIns="0" bIns="-5667" rtlCol="0" anchor="t"/>
           <a:lstStyle/>
           <a:p>
             <a:pPr algn="l" indent="0" marL="0">
@@ -2513,35 +2509,35 @@
               <a:buNone/>
             </a:pPr>
             <a:r>
-              <a:rPr lang="en-US" sz="2550" b="1" dirty="0" spc="5" kern="0">
+              <a:rPr lang="en-US" sz="2550" b="1" dirty="0" spc="-11" kern="0">
                 <a:solidFill>
                   <a:srgbClr val="F3EEE3"/>
                 </a:solidFill>
-                <a:latin typeface="Roboto Mono" pitchFamily="34" charset="0"/>
-                <a:ea typeface="Roboto Mono" pitchFamily="34" charset="-122"/>
-                <a:cs typeface="Roboto Mono" pitchFamily="34" charset="-120"/>
+                <a:latin typeface="Be Vietnam Pro" pitchFamily="34" charset="0"/>
+                <a:ea typeface="Be Vietnam Pro" pitchFamily="34" charset="-122"/>
+                <a:cs typeface="Be Vietnam Pro" pitchFamily="34" charset="-120"/>
               </a:rPr>
               <a:t>data</a:t>
             </a:r>
             <a:r>
-              <a:rPr lang="en-US" sz="2550" b="1" dirty="0" spc="6" kern="0">
+              <a:rPr lang="en-US" sz="2550" b="1" dirty="0" spc="0" kern="0">
                 <a:solidFill>
                   <a:srgbClr val="F3EEE3"/>
                 </a:solidFill>
-                <a:latin typeface="Roboto Mono" pitchFamily="34" charset="0"/>
-                <a:ea typeface="Roboto Mono" pitchFamily="34" charset="-122"/>
-                <a:cs typeface="Roboto Mono" pitchFamily="34" charset="-120"/>
+                <a:latin typeface="Be Vietnam Pro" pitchFamily="34" charset="0"/>
+                <a:ea typeface="Be Vietnam Pro" pitchFamily="34" charset="-122"/>
+                <a:cs typeface="Be Vietnam Pro" pitchFamily="34" charset="-120"/>
               </a:rPr>
               <a:t> +</a:t>
             </a:r>
             <a:r>
-              <a:rPr lang="en-US" sz="2550" b="1" dirty="0" spc="5" kern="0">
+              <a:rPr lang="en-US" sz="2550" b="1" dirty="0" spc="-11" kern="0">
                 <a:solidFill>
                   <a:srgbClr val="F3EEE3"/>
                 </a:solidFill>
-                <a:latin typeface="Roboto Mono" pitchFamily="34" charset="0"/>
-                <a:ea typeface="Roboto Mono" pitchFamily="34" charset="-122"/>
-                <a:cs typeface="Roboto Mono" pitchFamily="34" charset="-120"/>
+                <a:latin typeface="Be Vietnam Pro" pitchFamily="34" charset="0"/>
+                <a:ea typeface="Be Vietnam Pro" pitchFamily="34" charset="-122"/>
+                <a:cs typeface="Be Vietnam Pro" pitchFamily="34" charset="-120"/>
               </a:rPr>
               <a:t> errors</a:t>
             </a:r>
@@ -3104,35 +3100,35 @@
               <a:buNone/>
             </a:pPr>
             <a:r>
-              <a:rPr lang="en-US" sz="2550" b="1" dirty="0" spc="5" kern="0">
+              <a:rPr lang="en-US" sz="2550" b="1" dirty="0" spc="-1" kern="0">
                 <a:solidFill>
                   <a:srgbClr val="4A4945"/>
                 </a:solidFill>
-                <a:latin typeface="Roboto Mono" pitchFamily="34" charset="0"/>
-                <a:ea typeface="Roboto Mono" pitchFamily="34" charset="-122"/>
-                <a:cs typeface="Roboto Mono" pitchFamily="34" charset="-120"/>
+                <a:latin typeface="Be Vietnam Pro" pitchFamily="34" charset="0"/>
+                <a:ea typeface="Be Vietnam Pro" pitchFamily="34" charset="-122"/>
+                <a:cs typeface="Be Vietnam Pro" pitchFamily="34" charset="-120"/>
               </a:rPr>
               <a:t>title</a:t>
             </a:r>
             <a:r>
-              <a:rPr lang="en-US" sz="2550" b="1" dirty="0" spc="6" kern="0">
+              <a:rPr lang="en-US" sz="2550" b="1" dirty="0" spc="1" kern="0">
                 <a:solidFill>
                   <a:srgbClr val="4A4945"/>
                 </a:solidFill>
-                <a:latin typeface="Roboto Mono" pitchFamily="34" charset="0"/>
-                <a:ea typeface="Roboto Mono" pitchFamily="34" charset="-122"/>
-                <a:cs typeface="Roboto Mono" pitchFamily="34" charset="-120"/>
+                <a:latin typeface="Be Vietnam Pro" pitchFamily="34" charset="0"/>
+                <a:ea typeface="Be Vietnam Pro" pitchFamily="34" charset="-122"/>
+                <a:cs typeface="Be Vietnam Pro" pitchFamily="34" charset="-120"/>
               </a:rPr>
               <a:t> ·</a:t>
             </a:r>
             <a:r>
-              <a:rPr lang="en-US" sz="2550" b="1" dirty="0" spc="5" kern="0">
+              <a:rPr lang="en-US" sz="2550" b="1" dirty="0" spc="-2" kern="0">
                 <a:solidFill>
                   <a:srgbClr val="4A4945"/>
                 </a:solidFill>
-                <a:latin typeface="Roboto Mono" pitchFamily="34" charset="0"/>
-                <a:ea typeface="Roboto Mono" pitchFamily="34" charset="-122"/>
-                <a:cs typeface="Roboto Mono" pitchFamily="34" charset="-120"/>
+                <a:latin typeface="Be Vietnam Pro" pitchFamily="34" charset="0"/>
+                <a:ea typeface="Be Vietnam Pro" pitchFamily="34" charset="-122"/>
+                <a:cs typeface="Be Vietnam Pro" pitchFamily="34" charset="-120"/>
               </a:rPr>
               <a:t> summary</a:t>
             </a:r>
@@ -5129,7 +5125,7 @@
           <a:ln/>
         </p:spPr>
         <p:txBody>
-          <a:bodyPr wrap="square" lIns="0" tIns="12445" rIns="0" bIns="-12445" rtlCol="0" anchor="t"/>
+          <a:bodyPr wrap="square" lIns="0" tIns="5667" rIns="0" bIns="-5667" rtlCol="0" anchor="t"/>
           <a:lstStyle/>
           <a:p>
             <a:pPr algn="l" indent="0" marL="0">
@@ -5139,13 +5135,13 @@
               <a:buNone/>
             </a:pPr>
             <a:r>
-              <a:rPr lang="en-US" sz="2550" b="1" dirty="0" spc="5" kern="0">
+              <a:rPr lang="en-US" sz="2550" b="1" dirty="0" spc="-2" kern="0">
                 <a:solidFill>
                   <a:srgbClr val="14161C"/>
                 </a:solidFill>
-                <a:latin typeface="Roboto Mono" pitchFamily="34" charset="0"/>
-                <a:ea typeface="Roboto Mono" pitchFamily="34" charset="-122"/>
-                <a:cs typeface="Roboto Mono" pitchFamily="34" charset="-120"/>
+                <a:latin typeface="Be Vietnam Pro" pitchFamily="34" charset="0"/>
+                <a:ea typeface="Be Vietnam Pro" pitchFamily="34" charset="-122"/>
+                <a:cs typeface="Be Vietnam Pro" pitchFamily="34" charset="-120"/>
               </a:rPr>
               <a:t>title, summary</a:t>
             </a:r>
@@ -6790,13 +6786,13 @@
               <a:buNone/>
             </a:pPr>
             <a:r>
-              <a:rPr lang="en-US" sz="2550" b="1" dirty="0" spc="5" kern="0">
+              <a:rPr lang="en-US" sz="2550" b="1" dirty="0" spc="-1" kern="0">
                 <a:solidFill>
                   <a:srgbClr val="14161C"/>
                 </a:solidFill>
-                <a:latin typeface="Roboto Mono" pitchFamily="34" charset="0"/>
-                <a:ea typeface="Roboto Mono" pitchFamily="34" charset="-122"/>
-                <a:cs typeface="Roboto Mono" pitchFamily="34" charset="-120"/>
+                <a:latin typeface="Be Vietnam Pro" pitchFamily="34" charset="0"/>
+                <a:ea typeface="Be Vietnam Pro" pitchFamily="34" charset="-122"/>
+                <a:cs typeface="Be Vietnam Pro" pitchFamily="34" charset="-120"/>
               </a:rPr>
               <a:t>title</a:t>
             </a:r>
@@ -6912,13 +6908,13 @@
               <a:buNone/>
             </a:pPr>
             <a:r>
-              <a:rPr lang="en-US" sz="2550" b="1" dirty="0" spc="5" kern="0">
+              <a:rPr lang="en-US" sz="2550" b="1" dirty="0" spc="-2" kern="0">
                 <a:solidFill>
                   <a:srgbClr val="B45309"/>
                 </a:solidFill>
-                <a:latin typeface="Roboto Mono" pitchFamily="34" charset="0"/>
-                <a:ea typeface="Roboto Mono" pitchFamily="34" charset="-122"/>
-                <a:cs typeface="Roboto Mono" pitchFamily="34" charset="-120"/>
+                <a:latin typeface="Be Vietnam Pro" pitchFamily="34" charset="0"/>
+                <a:ea typeface="Be Vietnam Pro" pitchFamily="34" charset="-122"/>
+                <a:cs typeface="Be Vietnam Pro" pitchFamily="34" charset="-120"/>
               </a:rPr>
               <a:t>summary</a:t>
             </a:r>
@@ -6951,13 +6947,13 @@
               <a:buNone/>
             </a:pPr>
             <a:r>
-              <a:rPr lang="en-US" sz="2550" b="1" dirty="0" spc="5" kern="0">
+              <a:rPr lang="en-US" sz="2550" b="1" dirty="0" spc="-2" kern="0">
                 <a:solidFill>
                   <a:srgbClr val="14161C"/>
                 </a:solidFill>
-                <a:latin typeface="Roboto Mono" pitchFamily="34" charset="0"/>
-                <a:ea typeface="Roboto Mono" pitchFamily="34" charset="-122"/>
-                <a:cs typeface="Roboto Mono" pitchFamily="34" charset="-120"/>
+                <a:latin typeface="Be Vietnam Pro" pitchFamily="34" charset="0"/>
+                <a:ea typeface="Be Vietnam Pro" pitchFamily="34" charset="-122"/>
+                <a:cs typeface="Be Vietnam Pro" pitchFamily="34" charset="-120"/>
               </a:rPr>
               <a:t>null</a:t>
             </a:r>
@@ -7017,13 +7013,13 @@
               <a:buNone/>
             </a:pPr>
             <a:r>
-              <a:rPr lang="en-US" sz="2550" b="1" dirty="0" spc="5" kern="0">
+              <a:rPr lang="en-US" sz="2550" b="1" dirty="0" spc="-13" kern="0">
                 <a:solidFill>
                   <a:srgbClr val="14161C"/>
                 </a:solidFill>
-                <a:latin typeface="Roboto Mono" pitchFamily="34" charset="0"/>
-                <a:ea typeface="Roboto Mono" pitchFamily="34" charset="-122"/>
-                <a:cs typeface="Roboto Mono" pitchFamily="34" charset="-120"/>
+                <a:latin typeface="Be Vietnam Pro" pitchFamily="34" charset="0"/>
+                <a:ea typeface="Be Vietnam Pro" pitchFamily="34" charset="-122"/>
+                <a:cs typeface="Be Vietnam Pro" pitchFamily="34" charset="-120"/>
               </a:rPr>
               <a:t>errors</a:t>
             </a:r>
@@ -10610,13 +10606,13 @@
               <a:buNone/>
             </a:pPr>
             <a:r>
-              <a:rPr lang="en-US" sz="2700" b="1" dirty="0" spc="-5" kern="0">
+              <a:rPr lang="en-US" sz="2700" b="1" dirty="0" spc="-14" kern="0">
                 <a:solidFill>
                   <a:srgbClr val="FFB454"/>
                 </a:solidFill>
-                <a:latin typeface="Roboto Mono" pitchFamily="34" charset="0"/>
-                <a:ea typeface="Roboto Mono" pitchFamily="34" charset="-122"/>
-                <a:cs typeface="Roboto Mono" pitchFamily="34" charset="-120"/>
+                <a:latin typeface="Be Vietnam Pro" pitchFamily="34" charset="0"/>
+                <a:ea typeface="Be Vietnam Pro" pitchFamily="34" charset="-122"/>
+                <a:cs typeface="Be Vietnam Pro" pitchFamily="34" charset="-120"/>
               </a:rPr>
               <a:t>data</a:t>
             </a:r>
@@ -10802,22 +10798,11 @@
                 <a:solidFill>
                   <a:srgbClr val="1F3FD1"/>
                 </a:solidFill>
-                <a:latin typeface="Roboto Mono" pitchFamily="34" charset="0"/>
-                <a:ea typeface="Roboto Mono" pitchFamily="34" charset="-122"/>
-                <a:cs typeface="Roboto Mono" pitchFamily="34" charset="-120"/>
-              </a:rPr>
-              <a:t>book:</a:t>
-            </a:r>
-            <a:r>
-              <a:rPr lang="en-US" sz="2700" b="1" dirty="0" spc="-4" kern="0">
-                <a:solidFill>
-                  <a:srgbClr val="1F3FD1"/>
-                </a:solidFill>
-                <a:latin typeface="Roboto Mono" pitchFamily="34" charset="0"/>
-                <a:ea typeface="Roboto Mono" pitchFamily="34" charset="-122"/>
-                <a:cs typeface="Roboto Mono" pitchFamily="34" charset="-120"/>
-              </a:rPr>
-              <a:t> Book</a:t>
+                <a:latin typeface="Be Vietnam Pro" pitchFamily="34" charset="0"/>
+                <a:ea typeface="Be Vietnam Pro" pitchFamily="34" charset="-122"/>
+                <a:cs typeface="Be Vietnam Pro" pitchFamily="34" charset="-120"/>
+              </a:rPr>
+              <a:t>book: Book</a:t>
             </a:r>
             <a:endParaRPr lang="en-US" sz="2700" dirty="0"/>
           </a:p>
@@ -10964,24 +10949,24 @@
               <a:buNone/>
             </a:pPr>
             <a:r>
-              <a:rPr lang="en-US" sz="2700" b="1" dirty="0" spc="-5" kern="0">
+              <a:rPr lang="en-US" sz="2700" b="1" dirty="0" spc="-1" kern="0">
                 <a:solidFill>
                   <a:srgbClr val="E8472B"/>
                 </a:solidFill>
-                <a:latin typeface="Roboto Mono" pitchFamily="34" charset="0"/>
-                <a:ea typeface="Roboto Mono" pitchFamily="34" charset="-122"/>
-                <a:cs typeface="Roboto Mono" pitchFamily="34" charset="-120"/>
+                <a:latin typeface="Be Vietnam Pro" pitchFamily="34" charset="0"/>
+                <a:ea typeface="Be Vietnam Pro" pitchFamily="34" charset="-122"/>
+                <a:cs typeface="Be Vietnam Pro" pitchFamily="34" charset="-120"/>
               </a:rPr>
               <a:t>summary:</a:t>
             </a:r>
             <a:r>
-              <a:rPr lang="en-US" sz="2700" b="1" dirty="0" spc="-4" kern="0">
+              <a:rPr lang="en-US" sz="2700" b="1" dirty="0" spc="1" kern="0">
                 <a:solidFill>
                   <a:srgbClr val="E8472B"/>
                 </a:solidFill>
-                <a:latin typeface="Roboto Mono" pitchFamily="34" charset="0"/>
-                <a:ea typeface="Roboto Mono" pitchFamily="34" charset="-122"/>
-                <a:cs typeface="Roboto Mono" pitchFamily="34" charset="-120"/>
+                <a:latin typeface="Be Vietnam Pro" pitchFamily="34" charset="0"/>
+                <a:ea typeface="Be Vietnam Pro" pitchFamily="34" charset="-122"/>
+                <a:cs typeface="Be Vietnam Pro" pitchFamily="34" charset="-120"/>
               </a:rPr>
               <a:t> String!</a:t>
             </a:r>
